--- a/client/public/investor/RSF_Investor_Pitch_Deck.pptx
+++ b/client/public/investor/RSF_Investor_Pitch_Deck.pptx
@@ -2097,12 +2097,12 @@
               <a:buNone/>
             </a:pPr>
             <a:r>
-              <a:rPr lang="en-US" sz="4800" b="1" dirty="0">
+              <a:rPr sz="4800" b="1">
                 <a:solidFill>
                   <a:srgbClr val="FFFFFF"/>
                 </a:solidFill>
               </a:rPr>
-              <a:t>The Aviation</a:t>
+              <a:t>The Connected</a:t>
             </a:r>
             <a:endParaRPr lang="en-US" sz="4800" dirty="0"/>
           </a:p>
@@ -2133,12 +2133,12 @@
               <a:buNone/>
             </a:pPr>
             <a:r>
-              <a:rPr lang="en-US" sz="4800" b="1" dirty="0">
+              <a:rPr sz="3400" b="1">
                 <a:solidFill>
                   <a:srgbClr val="F0B429"/>
                 </a:solidFill>
               </a:rPr>
-              <a:t>Marketplace</a:t>
+              <a:t>Aviation Platform</a:t>
             </a:r>
             <a:endParaRPr lang="en-US" sz="4800" dirty="0"/>
           </a:p>
@@ -2169,12 +2169,12 @@
               <a:buNone/>
             </a:pPr>
             <a:r>
-              <a:rPr lang="en-US" sz="4800" b="1" dirty="0">
+              <a:rPr sz="3000" b="1">
                 <a:solidFill>
                   <a:srgbClr val="FFFFFF"/>
                 </a:solidFill>
               </a:rPr>
-              <a:t>with the Planning</a:t>
+              <a:t>with Marketplace &amp;</a:t>
             </a:r>
             <a:endParaRPr lang="en-US" sz="4800" dirty="0"/>
           </a:p>
@@ -2205,12 +2205,12 @@
               <a:buNone/>
             </a:pPr>
             <a:r>
-              <a:rPr lang="en-US" sz="4800" b="1" dirty="0">
+              <a:rPr sz="3000" b="1">
                 <a:solidFill>
                   <a:srgbClr val="FFFFFF"/>
                 </a:solidFill>
               </a:rPr>
-              <a:t>Tools Built In.</a:t>
+              <a:t>Pilot Tools Built In.</a:t>
             </a:r>
             <a:endParaRPr lang="en-US" sz="4800" dirty="0"/>
           </a:p>
@@ -2524,12 +2524,12 @@
               <a:buNone/>
             </a:pPr>
             <a:r>
-              <a:rPr lang="en-US" sz="5200" b="1" dirty="0">
+              <a:rPr sz="5200" b="1">
                 <a:solidFill>
                   <a:srgbClr val="0B1F3A"/>
                 </a:solidFill>
               </a:rPr>
-              <a:t>$150K</a:t>
+              <a:t>$500K</a:t>
             </a:r>
             <a:endParaRPr lang="en-US" sz="5200" dirty="0"/>
           </a:p>
@@ -2560,12 +2560,12 @@
               <a:buNone/>
             </a:pPr>
             <a:r>
-              <a:rPr lang="en-US" sz="850" b="1" spc="150" kern="0" dirty="0">
+              <a:rPr sz="850" b="1">
                 <a:solidFill>
                   <a:srgbClr val="132844"/>
                 </a:solidFill>
               </a:rPr>
-              <a:t>SEEKING  ·  OPEN TO $250K</a:t>
+              <a:t>OPEN PRE-SEED ROUND</a:t>
             </a:r>
             <a:endParaRPr lang="en-US" sz="850" dirty="0"/>
           </a:p>
@@ -2689,12 +2689,12 @@
               <a:buNone/>
             </a:pPr>
             <a:r>
-              <a:rPr lang="en-US" sz="800" b="1" dirty="0">
+              <a:rPr sz="800" b="1">
                 <a:solidFill>
                   <a:srgbClr val="0B1F3A"/>
                 </a:solidFill>
               </a:rPr>
-              <a:t>45%</a:t>
+              <a:t>25%</a:t>
             </a:r>
             <a:endParaRPr lang="en-US" sz="800" dirty="0"/>
           </a:p>
@@ -2725,12 +2725,12 @@
               <a:buNone/>
             </a:pPr>
             <a:r>
-              <a:rPr lang="en-US" sz="850" dirty="0">
+              <a:rPr sz="780">
                 <a:solidFill>
                   <a:srgbClr val="CBD5E1"/>
                 </a:solidFill>
               </a:rPr>
-              <a:t>Product &amp; Engineering — AirNav integration, GPS sim, mobile optimization</a:t>
+              <a:t>FAA Flight Service V&amp;V &amp; production progression</a:t>
             </a:r>
             <a:endParaRPr lang="en-US" sz="850" dirty="0"/>
           </a:p>
@@ -2786,12 +2786,12 @@
               <a:buNone/>
             </a:pPr>
             <a:r>
-              <a:rPr lang="en-US" sz="800" b="1" dirty="0">
+              <a:rPr sz="800" b="1">
                 <a:solidFill>
                   <a:srgbClr val="0B1F3A"/>
                 </a:solidFill>
               </a:rPr>
-              <a:t>25%</a:t>
+              <a:t>30%</a:t>
             </a:r>
             <a:endParaRPr lang="en-US" sz="800" dirty="0"/>
           </a:p>
@@ -2822,12 +2822,12 @@
               <a:buNone/>
             </a:pPr>
             <a:r>
-              <a:rPr lang="en-US" sz="850" dirty="0">
+              <a:rPr sz="780">
                 <a:solidFill>
                   <a:srgbClr val="CBD5E1"/>
                 </a:solidFill>
               </a:rPr>
-              <a:t>Growth &amp; Marketing — Paid acquisition, aviation community outreach</a:t>
+              <a:t>Product, engineering, reliability &amp; infrastructure</a:t>
             </a:r>
             <a:endParaRPr lang="en-US" sz="850" dirty="0"/>
           </a:p>
@@ -2883,12 +2883,12 @@
               <a:buNone/>
             </a:pPr>
             <a:r>
-              <a:rPr lang="en-US" sz="800" b="1" dirty="0">
+              <a:rPr sz="800" b="1">
                 <a:solidFill>
                   <a:srgbClr val="0B1F3A"/>
                 </a:solidFill>
               </a:rPr>
-              <a:t>20%</a:t>
+              <a:t>25%</a:t>
             </a:r>
             <a:endParaRPr lang="en-US" sz="800" dirty="0"/>
           </a:p>
@@ -2919,12 +2919,12 @@
               <a:buNone/>
             </a:pPr>
             <a:r>
-              <a:rPr lang="en-US" sz="850" dirty="0">
+              <a:rPr sz="780">
                 <a:solidFill>
                   <a:srgbClr val="CBD5E1"/>
                 </a:solidFill>
               </a:rPr>
-              <a:t>Operations &amp; Infrastructure — Hosting, APIs, security, legal</a:t>
+              <a:t>Pilot acquisition, subscriptions &amp; marketplace growth</a:t>
             </a:r>
             <a:endParaRPr lang="en-US" sz="850" dirty="0"/>
           </a:p>
@@ -2980,12 +2980,12 @@
               <a:buNone/>
             </a:pPr>
             <a:r>
-              <a:rPr lang="en-US" sz="800" b="1" dirty="0">
+              <a:rPr sz="800" b="1">
                 <a:solidFill>
                   <a:srgbClr val="0B1F3A"/>
                 </a:solidFill>
               </a:rPr>
-              <a:t>10%</a:t>
+              <a:t>20%</a:t>
             </a:r>
             <a:endParaRPr lang="en-US" sz="800" dirty="0"/>
           </a:p>
@@ -3016,12 +3016,12 @@
               <a:buNone/>
             </a:pPr>
             <a:r>
-              <a:rPr lang="en-US" sz="850" dirty="0">
+              <a:rPr sz="780">
                 <a:solidFill>
                   <a:srgbClr val="CBD5E1"/>
                 </a:solidFill>
               </a:rPr>
-              <a:t>Founder Runway — 6-month focused development sprint</a:t>
+              <a:t>Operations, compliance, legal &amp; runway</a:t>
             </a:r>
             <a:endParaRPr lang="en-US" sz="850" dirty="0"/>
           </a:p>
@@ -3162,12 +3162,12 @@
               <a:buNone/>
             </a:pPr>
             <a:r>
-              <a:rPr lang="en-US" sz="750" b="1" dirty="0">
+              <a:rPr sz="750" b="1">
                 <a:solidFill>
                   <a:srgbClr val="0B1F3A"/>
                 </a:solidFill>
               </a:rPr>
-              <a:t>Q2 2026</a:t>
+              <a:t>Q3 2026</a:t>
             </a:r>
             <a:endParaRPr lang="en-US" sz="750" dirty="0"/>
           </a:p>
@@ -3198,12 +3198,12 @@
               <a:buNone/>
             </a:pPr>
             <a:r>
-              <a:rPr lang="en-US" sz="900" dirty="0">
+              <a:rPr sz="800">
                 <a:solidFill>
                   <a:srgbClr val="CBD5E1"/>
                 </a:solidFill>
               </a:rPr>
-              <a:t>AirNav live, GPS simulator shipped, 500 registered users</a:t>
+              <a:t>Independent V&amp;V scope finalized; test matrix executed</a:t>
             </a:r>
             <a:endParaRPr lang="en-US" sz="900" dirty="0"/>
           </a:p>
@@ -3283,12 +3283,12 @@
               <a:buNone/>
             </a:pPr>
             <a:r>
-              <a:rPr lang="en-US" sz="750" b="1" dirty="0">
+              <a:rPr sz="750" b="1">
                 <a:solidFill>
                   <a:srgbClr val="0B1F3A"/>
                 </a:solidFill>
               </a:rPr>
-              <a:t>Q3 2026</a:t>
+              <a:t>Q4 2026</a:t>
             </a:r>
             <a:endParaRPr lang="en-US" sz="750" dirty="0"/>
           </a:p>
@@ -3319,12 +3319,12 @@
               <a:buNone/>
             </a:pPr>
             <a:r>
-              <a:rPr lang="en-US" sz="900" dirty="0">
+              <a:rPr sz="800">
                 <a:solidFill>
                   <a:srgbClr val="CBD5E1"/>
                 </a:solidFill>
               </a:rPr>
-              <a:t>First paying marketplace listings, 1,000 users, CFI school deals</a:t>
+              <a:t>Findings remediated; production package submitted</a:t>
             </a:r>
             <a:endParaRPr lang="en-US" sz="900" dirty="0"/>
           </a:p>
@@ -3404,12 +3404,12 @@
               <a:buNone/>
             </a:pPr>
             <a:r>
-              <a:rPr lang="en-US" sz="750" b="1" dirty="0">
+              <a:rPr sz="750" b="1">
                 <a:solidFill>
                   <a:srgbClr val="0B1F3A"/>
                 </a:solidFill>
               </a:rPr>
-              <a:t>Q4 2026</a:t>
+              <a:t>Q1 2027</a:t>
             </a:r>
             <a:endParaRPr lang="en-US" sz="750" dirty="0"/>
           </a:p>
@@ -3440,12 +3440,12 @@
               <a:buNone/>
             </a:pPr>
             <a:r>
-              <a:rPr lang="en-US" sz="900" dirty="0">
+              <a:rPr sz="800">
                 <a:solidFill>
                   <a:srgbClr val="CBD5E1"/>
                 </a:solidFill>
               </a:rPr>
-              <a:t>Pro subscription MRR &gt; $5K, Series A data room ready</a:t>
+              <a:t>Pilot growth, subscription conversion &amp; rental activity</a:t>
             </a:r>
             <a:endParaRPr lang="en-US" sz="900" dirty="0"/>
           </a:p>
@@ -3525,12 +3525,12 @@
               <a:buNone/>
             </a:pPr>
             <a:r>
-              <a:rPr lang="en-US" sz="750" b="1" dirty="0">
+              <a:rPr sz="750" b="1">
                 <a:solidFill>
                   <a:srgbClr val="0B1F3A"/>
                 </a:solidFill>
               </a:rPr>
-              <a:t>Q1 2027</a:t>
+              <a:t>Q2 2027</a:t>
             </a:r>
             <a:endParaRPr lang="en-US" sz="750" dirty="0"/>
           </a:p>
@@ -3561,12 +3561,12 @@
               <a:buNone/>
             </a:pPr>
             <a:r>
-              <a:rPr lang="en-US" sz="900" dirty="0">
+              <a:rPr sz="800">
                 <a:solidFill>
                   <a:srgbClr val="CBD5E1"/>
                 </a:solidFill>
               </a:rPr>
-              <a:t>Strategic partnership (AOPA / FBO network), 5,000 users</a:t>
+              <a:t>Strategic aviation relationships and infrastructure scale-up</a:t>
             </a:r>
             <a:endParaRPr lang="en-US" sz="900" dirty="0"/>
           </a:p>
@@ -3741,12 +3741,12 @@
               <a:buNone/>
             </a:pPr>
             <a:r>
-              <a:rPr lang="en-US" sz="3000" b="1" dirty="0">
+              <a:rPr sz="2800" b="1">
                 <a:solidFill>
                   <a:srgbClr val="FFFFFF"/>
                 </a:solidFill>
               </a:rPr>
-              <a:t>The Aviation Marketplace</a:t>
+              <a:t>The Connected Aviation Platform</a:t>
             </a:r>
             <a:endParaRPr lang="en-US" sz="3000" dirty="0"/>
           </a:p>
@@ -3777,12 +3777,12 @@
               <a:buNone/>
             </a:pPr>
             <a:r>
-              <a:rPr lang="en-US" sz="3000" b="1" dirty="0">
+              <a:rPr sz="2800" b="1">
                 <a:solidFill>
                   <a:srgbClr val="F0B429"/>
                 </a:solidFill>
               </a:rPr>
-              <a:t>with the Planning Tools Built In.</a:t>
+              <a:t>with Marketplace &amp; Pilot Tools Built In.</a:t>
             </a:r>
             <a:endParaRPr lang="en-US" sz="3000" dirty="0"/>
           </a:p>
@@ -3836,28 +3836,25 @@
               <a:buNone/>
             </a:pPr>
             <a:r>
-              <a:rPr lang="en-US" sz="1400" i="1" dirty="0">
+              <a:rPr sz="1330" i="1">
                 <a:solidFill>
                   <a:srgbClr val="CBD5E1"/>
                 </a:solidFill>
               </a:rPr>
-              <a:t>Pilots deserve a platform that works as hard as they do.</a:t>
+              <a:t>Pilots deserve a platform that connects the work they already do.</a:t>
             </a:r>
             <a:endParaRPr lang="en-US" sz="1400" dirty="0"/>
           </a:p>
           <a:p>
-            <a:pPr algn="ctr" indent="0" marL="0">
-              <a:buNone/>
-            </a:pPr>
-            <a:r>
-              <a:rPr lang="en-US" sz="1400" i="1" dirty="0">
+            <a:pPr algn="ctr"/>
+            <a:r>
+              <a:rPr sz="1330" i="1">
                 <a:solidFill>
                   <a:srgbClr val="CBD5E1"/>
                 </a:solidFill>
               </a:rPr>
-              <a:t>RSF is that platform — and we're just getting started.</a:t>
-            </a:r>
-            <a:endParaRPr lang="en-US" sz="1400" dirty="0"/>
+              <a:t>RSF is building that ecosystem - and this round moves it into its next stage.</a:t>
+            </a:r>
           </a:p>
         </p:txBody>
       </p:sp>
@@ -4893,12 +4890,12 @@
               <a:buNone/>
             </a:pPr>
             <a:r>
-              <a:rPr lang="en-US" sz="1200" dirty="0">
+              <a:rPr sz="1100">
                 <a:solidFill>
                   <a:srgbClr val="132844"/>
                 </a:solidFill>
               </a:rPr>
-              <a:t>Ready Set Fly is the aviation marketplace with the planning tools built in — the only platform where pilots can rent or list aircraft AND complete their full pre-flight workflow in a single destination.</a:t>
+              <a:t>Ready Set Fly connects marketplace discovery, flight planning, aviation weather, training tools, logbook workflows, and FAA Flight Service capability in one general aviation platform.</a:t>
             </a:r>
             <a:endParaRPr lang="en-US" sz="1200" dirty="0"/>
           </a:p>
@@ -5074,12 +5071,12 @@
               <a:buNone/>
             </a:pPr>
             <a:r>
-              <a:rPr lang="en-US" sz="1000" i="1" dirty="0">
+              <a:rPr sz="919" i="1">
                 <a:solidFill>
                   <a:srgbClr val="94A3B8"/>
                 </a:solidFill>
               </a:rPr>
-              <a:t>Tools drive pilots to the platform → pilots discover the marketplace → marketplace revenue funds better tools.</a:t>
+              <a:t>Tools bring pilots in -&gt; pilots stay for workflow depth -&gt; marketplace and subscriptions fund better tools.</a:t>
             </a:r>
             <a:endParaRPr lang="en-US" sz="1000" dirty="0"/>
           </a:p>
@@ -5652,12 +5649,12 @@
               <a:buNone/>
             </a:pPr>
             <a:r>
-              <a:rPr lang="en-US" sz="900" b="1" dirty="0">
+              <a:rPr sz="900" b="1">
                 <a:solidFill>
                   <a:srgbClr val="FFFFFF"/>
                 </a:solidFill>
               </a:rPr>
-              <a:t>GPS Simulator</a:t>
+              <a:t>Flight Service</a:t>
             </a:r>
             <a:endParaRPr lang="en-US" sz="900" dirty="0"/>
           </a:p>
@@ -7246,12 +7243,12 @@
               <a:buNone/>
             </a:pPr>
             <a:r>
-              <a:rPr lang="en-US" sz="3600" b="1" dirty="0">
+              <a:rPr sz="3600" b="1">
                 <a:solidFill>
                   <a:srgbClr val="F0B429"/>
                 </a:solidFill>
               </a:rPr>
-              <a:t>1,294</a:t>
+              <a:t>4,300+</a:t>
             </a:r>
             <a:endParaRPr lang="en-US" sz="3600" dirty="0"/>
           </a:p>
@@ -7282,12 +7279,12 @@
               <a:buNone/>
             </a:pPr>
             <a:r>
-              <a:rPr lang="en-US" sz="1100" b="1" dirty="0">
+              <a:rPr sz="1000" b="1">
                 <a:solidFill>
                   <a:srgbClr val="0B1F3A"/>
                 </a:solidFill>
               </a:rPr>
-              <a:t>Active Users QTD</a:t>
+              <a:t>Early Visitor Signals</a:t>
             </a:r>
             <a:endParaRPr lang="en-US" sz="1100" dirty="0"/>
           </a:p>
@@ -7318,12 +7315,12 @@
               <a:buNone/>
             </a:pPr>
             <a:r>
-              <a:rPr lang="en-US" sz="900" dirty="0">
+              <a:rPr sz="800">
                 <a:solidFill>
                   <a:srgbClr val="94A3B8"/>
                 </a:solidFill>
               </a:rPr>
-              <a:t>Jan 1 – Mar 11, 2026 · 99.7% new</a:t>
+              <a:t>Launch traffic + engagement</a:t>
             </a:r>
             <a:endParaRPr lang="en-US" sz="900" dirty="0"/>
           </a:p>
@@ -7411,7 +7408,7 @@
               <a:buNone/>
             </a:pPr>
             <a:r>
-              <a:rPr lang="en-US" sz="3600" b="1" dirty="0">
+              <a:rPr sz="3600" b="1">
                 <a:solidFill>
                   <a:srgbClr val="F0B429"/>
                 </a:solidFill>
@@ -7447,12 +7444,12 @@
               <a:buNone/>
             </a:pPr>
             <a:r>
-              <a:rPr lang="en-US" sz="1100" b="1" dirty="0">
+              <a:rPr sz="1000" b="1">
                 <a:solidFill>
                   <a:srgbClr val="0B1F3A"/>
                 </a:solidFill>
               </a:rPr>
-              <a:t>Events QTD</a:t>
+              <a:t>Tracked Events</a:t>
             </a:r>
             <a:endParaRPr lang="en-US" sz="1100" dirty="0"/>
           </a:p>
@@ -7483,12 +7480,12 @@
               <a:buNone/>
             </a:pPr>
             <a:r>
-              <a:rPr lang="en-US" sz="900" dirty="0">
+              <a:rPr sz="800">
                 <a:solidFill>
                   <a:srgbClr val="94A3B8"/>
                 </a:solidFill>
               </a:rPr>
-              <a:t>94s avg engagement time per user</a:t>
+              <a:t>Tool + marketplace activity</a:t>
             </a:r>
             <a:endParaRPr lang="en-US" sz="900" dirty="0"/>
           </a:p>
@@ -7576,12 +7573,12 @@
               <a:buNone/>
             </a:pPr>
             <a:r>
-              <a:rPr lang="en-US" sz="3600" b="1" dirty="0">
+              <a:rPr sz="3600" b="1">
                 <a:solidFill>
                   <a:srgbClr val="F0B429"/>
                 </a:solidFill>
               </a:rPr>
-              <a:t>~7%</a:t>
+              <a:t>V&amp;V</a:t>
             </a:r>
             <a:endParaRPr lang="en-US" sz="3600" dirty="0"/>
           </a:p>
@@ -7612,12 +7609,12 @@
               <a:buNone/>
             </a:pPr>
             <a:r>
-              <a:rPr lang="en-US" sz="1100" b="1" dirty="0">
+              <a:rPr sz="950" b="1">
                 <a:solidFill>
                   <a:srgbClr val="0B1F3A"/>
                 </a:solidFill>
               </a:rPr>
-              <a:t>Bounce Rate</a:t>
+              <a:t>Flight Service Stage</a:t>
             </a:r>
             <a:endParaRPr lang="en-US" sz="1100" dirty="0"/>
           </a:p>
@@ -7648,12 +7645,12 @@
               <a:buNone/>
             </a:pPr>
             <a:r>
-              <a:rPr lang="en-US" sz="900" dirty="0">
+              <a:rPr sz="800">
                 <a:solidFill>
                   <a:srgbClr val="94A3B8"/>
                 </a:solidFill>
               </a:rPr>
-              <a:t>Tool Hub &amp; Marketplace — industry low</a:t>
+              <a:t>Independent testing next</a:t>
             </a:r>
             <a:endParaRPr lang="en-US" sz="900" dirty="0"/>
           </a:p>
@@ -7741,12 +7738,12 @@
               <a:buNone/>
             </a:pPr>
             <a:r>
-              <a:rPr lang="en-US" sz="3600" b="1" dirty="0">
+              <a:rPr sz="3600" b="1">
                 <a:solidFill>
                   <a:srgbClr val="F0B429"/>
                 </a:solidFill>
               </a:rPr>
-              <a:t>5x</a:t>
+              <a:t>Live</a:t>
             </a:r>
             <a:endParaRPr lang="en-US" sz="3600" dirty="0"/>
           </a:p>
@@ -7777,12 +7774,12 @@
               <a:buNone/>
             </a:pPr>
             <a:r>
-              <a:rPr lang="en-US" sz="1100" b="1" dirty="0">
+              <a:rPr sz="1000" b="1">
                 <a:solidFill>
                   <a:srgbClr val="0B1F3A"/>
                 </a:solidFill>
               </a:rPr>
-              <a:t>Signup Growth</a:t>
+              <a:t>Platform Status</a:t>
             </a:r>
             <a:endParaRPr lang="en-US" sz="1100" dirty="0"/>
           </a:p>
@@ -7813,12 +7810,12 @@
               <a:buNone/>
             </a:pPr>
             <a:r>
-              <a:rPr lang="en-US" sz="900" dirty="0">
+              <a:rPr sz="800">
                 <a:solidFill>
                   <a:srgbClr val="94A3B8"/>
                 </a:solidFill>
               </a:rPr>
-              <a:t>After landing page conversion sprint</a:t>
+              <a:t>Web + mobile ecosystem</a:t>
             </a:r>
             <a:endParaRPr lang="en-US" sz="900" dirty="0"/>
           </a:p>
@@ -7930,12 +7927,12 @@
               <a:buNone/>
             </a:pPr>
             <a:r>
-              <a:rPr lang="en-US" sz="1200" b="1" dirty="0">
+              <a:rPr sz="1200" b="1">
                 <a:solidFill>
                   <a:srgbClr val="FFFFFF"/>
                 </a:solidFill>
               </a:rPr>
-              <a:t>GA4 Highlights  ·  QTD Jan–Mar 2026</a:t>
+              <a:t>August 2026 Investor Update</a:t>
             </a:r>
             <a:endParaRPr lang="en-US" sz="1200" dirty="0"/>
           </a:p>
@@ -7966,12 +7963,12 @@
               <a:buNone/>
             </a:pPr>
             <a:r>
-              <a:rPr lang="en-US" sz="950" dirty="0">
+              <a:rPr sz="860">
                 <a:solidFill>
                   <a:srgbClr val="CBD5E1"/>
                 </a:solidFill>
               </a:rPr>
-              <a:t>Facebook is the #1 acquisition channel (678 users), with 594 direct — showing strong word-of-mouth. The Tool Hub leads with 7,081 views at a 7.6% bounce rate, and the Marketplace page draws 4,793 views at 7.3% bounce. The E6B tool averages 7.2 events per user — a strong signal of deep engagement. Aircraft Rentals page: 0% bounce rate.</a:t>
+              <a:t>RSF has moved from early tool adoption into a broader connected GA workflow. The platform is live, pilot tools are deployed, and FAA Flight Service capability is built in the test environment as RSF prepares for independent V&amp;V and production progression.</a:t>
             </a:r>
             <a:endParaRPr lang="en-US" sz="950" dirty="0"/>
           </a:p>
@@ -8070,12 +8067,12 @@
               <a:buNone/>
             </a:pPr>
             <a:r>
-              <a:rPr lang="en-US" sz="850" dirty="0">
+              <a:rPr sz="850">
                 <a:solidFill>
                   <a:srgbClr val="0B1F3A"/>
                 </a:solidFill>
               </a:rPr>
-              <a:t>✓  Full-stack app live (React / Express / PG)</a:t>
+              <a:t>✓  Web platform live (React / Express / PG)</a:t>
             </a:r>
             <a:endParaRPr lang="en-US" sz="850" dirty="0"/>
           </a:p>
@@ -8106,12 +8103,12 @@
               <a:buNone/>
             </a:pPr>
             <a:r>
-              <a:rPr lang="en-US" sz="850" dirty="0">
+              <a:rPr sz="850">
                 <a:solidFill>
                   <a:srgbClr val="0B1F3A"/>
                 </a:solidFill>
               </a:rPr>
-              <a:t>✓  11+ integrated tools deployed</a:t>
+              <a:t>✓  Mobile app + subscription system</a:t>
             </a:r>
             <a:endParaRPr lang="en-US" sz="850" dirty="0"/>
           </a:p>
@@ -8142,12 +8139,12 @@
               <a:buNone/>
             </a:pPr>
             <a:r>
-              <a:rPr lang="en-US" sz="850" dirty="0">
+              <a:rPr sz="850">
                 <a:solidFill>
                   <a:srgbClr val="0B1F3A"/>
                 </a:solidFill>
               </a:rPr>
-              <a:t>✓  Logbook + Pro subscription system</a:t>
+              <a:t>✓  Flight Planner + live aviation data</a:t>
             </a:r>
             <a:endParaRPr lang="en-US" sz="850" dirty="0"/>
           </a:p>
@@ -8178,12 +8175,12 @@
               <a:buNone/>
             </a:pPr>
             <a:r>
-              <a:rPr lang="en-US" sz="850" dirty="0">
+              <a:rPr sz="760">
                 <a:solidFill>
                   <a:srgbClr val="94A3B8"/>
                 </a:solidFill>
               </a:rPr>
-              <a:t>✓  CFI Dashboard &amp; Directory</a:t>
+              <a:t>✓  FAA Flight Service integration in validation</a:t>
             </a:r>
             <a:endParaRPr lang="en-US" sz="850" dirty="0"/>
           </a:p>
@@ -8214,12 +8211,12 @@
               <a:buNone/>
             </a:pPr>
             <a:r>
-              <a:rPr lang="en-US" sz="850" dirty="0">
+              <a:rPr sz="850">
                 <a:solidFill>
                   <a:srgbClr val="94A3B8"/>
                 </a:solidFill>
               </a:rPr>
-              <a:t>✓  AI Weather &amp; NOTAM Translator</a:t>
+              <a:t>✓  Digital Logbook + Pro tiers</a:t>
             </a:r>
             <a:endParaRPr lang="en-US" sz="850" dirty="0"/>
           </a:p>
@@ -8250,12 +8247,12 @@
               <a:buNone/>
             </a:pPr>
             <a:r>
-              <a:rPr lang="en-US" sz="850" dirty="0">
+              <a:rPr sz="850">
                 <a:solidFill>
                   <a:srgbClr val="94A3B8"/>
                 </a:solidFill>
               </a:rPr>
-              <a:t>✓  Fuel Price Finder (mock → AirNav ready)</a:t>
+              <a:t>✓  Marketplace + CFI workflows</a:t>
             </a:r>
             <a:endParaRPr lang="en-US" sz="850" dirty="0"/>
           </a:p>
@@ -8635,12 +8632,12 @@
               <a:buNone/>
             </a:pPr>
             <a:r>
-              <a:rPr lang="en-US" sz="1000" b="1" dirty="0">
+              <a:rPr sz="1000" b="1">
                 <a:solidFill>
                   <a:srgbClr val="FFFFFF"/>
                 </a:solidFill>
               </a:rPr>
-              <a:t>List &amp; Rent Traditional Aircraft</a:t>
+              <a:t>List &amp; Rent Aircraft</a:t>
             </a:r>
             <a:endParaRPr lang="en-US" sz="1000" dirty="0"/>
           </a:p>
@@ -8671,12 +8668,12 @@
               <a:buNone/>
             </a:pPr>
             <a:r>
-              <a:rPr lang="en-US" sz="900" dirty="0">
+              <a:rPr sz="850">
                 <a:solidFill>
                   <a:srgbClr val="CBD5E1"/>
                 </a:solidFill>
               </a:rPr>
-              <a:t>First 5 listings FREE with TAILWINDS code</a:t>
+              <a:t>Free to list; transaction model planned</a:t>
             </a:r>
             <a:endParaRPr lang="en-US" sz="900" dirty="0"/>
           </a:p>
@@ -8731,7 +8728,7 @@
               <a:buNone/>
             </a:pPr>
             <a:r>
-              <a:rPr lang="en-US" sz="1000" b="1" dirty="0">
+              <a:rPr sz="1000" b="1">
                 <a:solidFill>
                   <a:srgbClr val="FFFFFF"/>
                 </a:solidFill>
@@ -8767,12 +8764,12 @@
               <a:buNone/>
             </a:pPr>
             <a:r>
-              <a:rPr lang="en-US" sz="900" dirty="0">
+              <a:rPr sz="850">
                 <a:solidFill>
                   <a:srgbClr val="CBD5E1"/>
                 </a:solidFill>
               </a:rPr>
-              <a:t>Integrated with logbook + ratings</a:t>
+              <a:t>Profiles, logbook, and ratings context</a:t>
             </a:r>
             <a:endParaRPr lang="en-US" sz="900" dirty="0"/>
           </a:p>
@@ -8827,12 +8824,12 @@
               <a:buNone/>
             </a:pPr>
             <a:r>
-              <a:rPr lang="en-US" sz="1000" b="1" dirty="0">
+              <a:rPr sz="1000" b="1">
                 <a:solidFill>
                   <a:srgbClr val="FFFFFF"/>
                 </a:solidFill>
               </a:rPr>
-              <a:t>Promo pricing active</a:t>
+              <a:t>Rental workflow monetization</a:t>
             </a:r>
             <a:endParaRPr lang="en-US" sz="1000" dirty="0"/>
           </a:p>
@@ -8863,12 +8860,12 @@
               <a:buNone/>
             </a:pPr>
             <a:r>
-              <a:rPr lang="en-US" sz="900" dirty="0">
+              <a:rPr sz="850">
                 <a:solidFill>
                   <a:srgbClr val="CBD5E1"/>
                 </a:solidFill>
               </a:rPr>
-              <a:t>Revenue model: listing fees + premium tiers</a:t>
+              <a:t>Commission on completed rentals</a:t>
             </a:r>
             <a:endParaRPr lang="en-US" sz="900" dirty="0"/>
           </a:p>
@@ -8923,12 +8920,12 @@
               <a:buNone/>
             </a:pPr>
             <a:r>
-              <a:rPr lang="en-US" sz="1000" b="1" dirty="0">
+              <a:rPr sz="1000" b="1">
                 <a:solidFill>
                   <a:srgbClr val="FFFFFF"/>
                 </a:solidFill>
               </a:rPr>
-              <a:t>AirNav fuel integration</a:t>
+              <a:t>Marketplace expansion</a:t>
             </a:r>
             <a:endParaRPr lang="en-US" sz="1000" dirty="0"/>
           </a:p>
@@ -8959,12 +8956,12 @@
               <a:buNone/>
             </a:pPr>
             <a:r>
-              <a:rPr lang="en-US" sz="900" dirty="0">
+              <a:rPr sz="850">
                 <a:solidFill>
                   <a:srgbClr val="CBD5E1"/>
                 </a:solidFill>
               </a:rPr>
-              <a:t>Env-var swappable provider architecture</a:t>
+              <a:t>Owners, CFIs, schools, and services</a:t>
             </a:r>
             <a:endParaRPr lang="en-US" sz="900" dirty="0"/>
           </a:p>
@@ -9129,12 +9126,12 @@
               <a:buNone/>
             </a:pPr>
             <a:r>
-              <a:rPr lang="en-US" sz="1000" b="1" dirty="0">
+              <a:rPr sz="1000" b="1">
                 <a:solidFill>
                   <a:srgbClr val="FFFFFF"/>
                 </a:solidFill>
               </a:rPr>
-              <a:t>Flight Planner + E6B Calculator</a:t>
+              <a:t>Flight Planner + E6B</a:t>
             </a:r>
             <a:endParaRPr lang="en-US" sz="1000" dirty="0"/>
           </a:p>
@@ -9165,7 +9162,7 @@
               <a:buNone/>
             </a:pPr>
             <a:r>
-              <a:rPr lang="en-US" sz="900" dirty="0">
+              <a:rPr sz="900">
                 <a:solidFill>
                   <a:srgbClr val="CBD5E1"/>
                 </a:solidFill>
@@ -9225,12 +9222,12 @@
               <a:buNone/>
             </a:pPr>
             <a:r>
-              <a:rPr lang="en-US" sz="1000" b="1" dirty="0">
+              <a:rPr sz="950" b="1">
                 <a:solidFill>
                   <a:srgbClr val="FFFFFF"/>
                 </a:solidFill>
               </a:rPr>
-              <a:t>AI Weather &amp; NOTAM Translator</a:t>
+              <a:t>FAA Flight Service Integration</a:t>
             </a:r>
             <a:endParaRPr lang="en-US" sz="1000" dirty="0"/>
           </a:p>
@@ -9261,12 +9258,12 @@
               <a:buNone/>
             </a:pPr>
             <a:r>
-              <a:rPr lang="en-US" sz="900" dirty="0">
+              <a:rPr sz="850">
                 <a:solidFill>
                   <a:srgbClr val="CBD5E1"/>
                 </a:solidFill>
               </a:rPr>
-              <a:t>Plain-English decoding, real-time updates</a:t>
+              <a:t>Built; test and validation stage</a:t>
             </a:r>
             <a:endParaRPr lang="en-US" sz="900" dirty="0"/>
           </a:p>
@@ -9321,12 +9318,12 @@
               <a:buNone/>
             </a:pPr>
             <a:r>
-              <a:rPr lang="en-US" sz="1000" b="1" dirty="0">
+              <a:rPr sz="950" b="1">
                 <a:solidFill>
                   <a:srgbClr val="FFFFFF"/>
                 </a:solidFill>
               </a:rPr>
-              <a:t>Radio Comms &amp; GPS Simulators</a:t>
+              <a:t>AI Weather &amp; NOTAM Intelligence</a:t>
             </a:r>
             <a:endParaRPr lang="en-US" sz="1000" dirty="0"/>
           </a:p>
@@ -9357,12 +9354,12 @@
               <a:buNone/>
             </a:pPr>
             <a:r>
-              <a:rPr lang="en-US" sz="900" dirty="0">
+              <a:rPr sz="900">
                 <a:solidFill>
                   <a:srgbClr val="CBD5E1"/>
                 </a:solidFill>
               </a:rPr>
-              <a:t>Training tools for student pilots &amp; CFIs</a:t>
+              <a:t>Plain-English decoding and live data</a:t>
             </a:r>
             <a:endParaRPr lang="en-US" sz="900" dirty="0"/>
           </a:p>
@@ -9417,12 +9414,12 @@
               <a:buNone/>
             </a:pPr>
             <a:r>
-              <a:rPr lang="en-US" sz="1000" b="1" dirty="0">
+              <a:rPr sz="1000" b="1">
                 <a:solidFill>
                   <a:srgbClr val="FFFFFF"/>
                 </a:solidFill>
               </a:rPr>
-              <a:t>CFI Dashboard + Training Center</a:t>
+              <a:t>Logbook + Training Workflows</a:t>
             </a:r>
             <a:endParaRPr lang="en-US" sz="1000" dirty="0"/>
           </a:p>
@@ -9453,12 +9450,12 @@
               <a:buNone/>
             </a:pPr>
             <a:r>
-              <a:rPr lang="en-US" sz="900" dirty="0">
+              <a:rPr sz="850">
                 <a:solidFill>
                   <a:srgbClr val="CBD5E1"/>
                 </a:solidFill>
               </a:rPr>
-              <a:t>Pro tier for instructors, schools &amp; students</a:t>
+              <a:t>Pro tools for pilots, CFIs, and students</a:t>
             </a:r>
             <a:endParaRPr lang="en-US" sz="900" dirty="0"/>
           </a:p>
@@ -9835,12 +9832,12 @@
               <a:buNone/>
             </a:pPr>
             <a:r>
-              <a:rPr lang="en-US" sz="900" dirty="0">
+              <a:rPr sz="830">
                 <a:solidFill>
                   <a:srgbClr val="94A3B8"/>
                 </a:solidFill>
               </a:rPr>
-              <a:t>Listing fees, premium placement, and transaction fees on aircraft rentals and sales.</a:t>
+              <a:t>Free-to-list rental supply with RSF monetizing completed transactions, promoted listings, and marketplace activity.</a:t>
             </a:r>
             <a:endParaRPr lang="en-US" sz="900" dirty="0"/>
           </a:p>
@@ -9896,12 +9893,12 @@
               <a:buNone/>
             </a:pPr>
             <a:r>
-              <a:rPr lang="en-US" sz="700" b="1" spc="100" kern="0" dirty="0">
+              <a:rPr sz="700" b="1">
                 <a:solidFill>
                   <a:srgbClr val="FFFFFF"/>
                 </a:solidFill>
               </a:rPr>
-              <a:t>ACTIVE (PROMO)</a:t>
+              <a:t>ACTIVE</a:t>
             </a:r>
             <a:endParaRPr lang="en-US" sz="700" dirty="0"/>
           </a:p>
@@ -10049,12 +10046,12 @@
               <a:buNone/>
             </a:pPr>
             <a:r>
-              <a:rPr lang="en-US" sz="900" dirty="0">
+              <a:rPr sz="819">
                 <a:solidFill>
                   <a:srgbClr val="94A3B8"/>
                 </a:solidFill>
               </a:rPr>
-              <a:t>Tiered subscription unlocking Digital Logbook, CFI tools, advanced flight planning &amp; AI features.</a:t>
+              <a:t>Core and Pro+ tiers for logbook analytics, saved planning workflows, alerts, and advanced pilot tools.</a:t>
             </a:r>
             <a:endParaRPr lang="en-US" sz="900" dirty="0"/>
           </a:p>
@@ -10263,12 +10260,12 @@
               <a:buNone/>
             </a:pPr>
             <a:r>
-              <a:rPr lang="en-US" sz="900" dirty="0">
+              <a:rPr sz="830">
                 <a:solidFill>
                   <a:srgbClr val="94A3B8"/>
                 </a:solidFill>
               </a:rPr>
-              <a:t>Professional dashboard for CFIs and flight schools. Per-seat or school-wide licensing model.</a:t>
+              <a:t>Training workflows and professional tools for CFIs, students, and school/operator use cases.</a:t>
             </a:r>
             <a:endParaRPr lang="en-US" sz="900" dirty="0"/>
           </a:p>
@@ -10477,12 +10474,12 @@
               <a:buNone/>
             </a:pPr>
             <a:r>
-              <a:rPr lang="en-US" sz="900" dirty="0">
+              <a:rPr sz="830">
                 <a:solidFill>
                   <a:srgbClr val="94A3B8"/>
                 </a:solidFill>
               </a:rPr>
-              <a:t>Aviation-adjacent advertisers (insurance, avionics, training). Impression-based, already rotating.</a:t>
+              <a:t>Aviation-focused placements for insurance, avionics, training, and other GA-adjacent advertisers.</a:t>
             </a:r>
             <a:endParaRPr lang="en-US" sz="900" dirty="0"/>
           </a:p>
@@ -10655,12 +10652,12 @@
               <a:buNone/>
             </a:pPr>
             <a:r>
-              <a:rPr lang="en-US" sz="1100" b="1" dirty="0">
+              <a:rPr sz="1100" b="1">
                 <a:solidFill>
                   <a:srgbClr val="0B1F3A"/>
                 </a:solidFill>
               </a:rPr>
-              <a:t>Data &amp; Partnerships</a:t>
+              <a:t>Strategic Relationships</a:t>
             </a:r>
             <a:endParaRPr lang="en-US" sz="1100" dirty="0"/>
           </a:p>
@@ -10691,12 +10688,12 @@
               <a:buNone/>
             </a:pPr>
             <a:r>
-              <a:rPr lang="en-US" sz="900" dirty="0">
+              <a:rPr sz="810">
                 <a:solidFill>
                   <a:srgbClr val="94A3B8"/>
                 </a:solidFill>
               </a:rPr>
-              <a:t>Aggregate anonymized flight planning &amp; fuel price data. AirNav, AOPA, and FBO partnerships.</a:t>
+              <a:t>Aviation data, service-provider, CFI, flight-school, FBO, and association relationship opportunities.</a:t>
             </a:r>
             <a:endParaRPr lang="en-US" sz="900" dirty="0"/>
           </a:p>
@@ -10967,28 +10964,25 @@
               <a:buNone/>
             </a:pPr>
             <a:r>
-              <a:rPr lang="en-US" sz="2400" b="1" dirty="0">
+              <a:rPr sz="2400" b="1">
                 <a:solidFill>
                   <a:srgbClr val="FFFFFF"/>
                 </a:solidFill>
               </a:rPr>
-              <a:t>We Don't Have a Direct Competitor.</a:t>
+              <a:t>Different From Single-Purpose</a:t>
             </a:r>
             <a:endParaRPr lang="en-US" sz="2400" dirty="0"/>
           </a:p>
           <a:p>
-            <a:pPr indent="0" marL="0">
-              <a:buNone/>
-            </a:pPr>
-            <a:r>
-              <a:rPr lang="en-US" sz="2400" b="1" dirty="0">
+            <a:pPr/>
+            <a:r>
+              <a:rPr sz="2400" b="1">
                 <a:solidFill>
                   <a:srgbClr val="FFFFFF"/>
                 </a:solidFill>
               </a:rPr>
-              <a:t>That's the Point.</a:t>
-            </a:r>
-            <a:endParaRPr lang="en-US" sz="2400" dirty="0"/>
+              <a:t>Aviation Tools</a:t>
+            </a:r>
           </a:p>
         </p:txBody>
       </p:sp>
@@ -13449,12 +13443,12 @@
               <a:buNone/>
             </a:pPr>
             <a:r>
-              <a:rPr lang="en-US" sz="950" i="1" dirty="0">
+              <a:rPr sz="810" i="1">
                 <a:solidFill>
                   <a:srgbClr val="94A3B8"/>
                 </a:solidFill>
               </a:rPr>
-              <a:t>RSF is the only platform combining a marketplace with an integrated tool ecosystem — creating a flywheel no single-purpose competitor can replicate.</a:t>
+              <a:t>RSF differentiates itself by combining marketplace discovery with an integrated pilot-tool and workflow ecosystem - not by trying to replace single-purpose EFB or listing platforms.</a:t>
             </a:r>
             <a:endParaRPr lang="en-US" sz="950" dirty="0"/>
           </a:p>
@@ -13853,12 +13847,12 @@
               <a:buNone/>
             </a:pPr>
             <a:r>
-              <a:rPr lang="en-US" sz="950" dirty="0">
+              <a:rPr sz="950">
                 <a:solidFill>
                   <a:srgbClr val="CBD5E1"/>
                 </a:solidFill>
               </a:rPr>
-              <a:t>Free tools drive organic search &amp; word-of-mouth</a:t>
+              <a:t>Free tools introduce pilots to RSF</a:t>
             </a:r>
             <a:endParaRPr lang="en-US" sz="950" dirty="0"/>
           </a:p>
@@ -13913,12 +13907,12 @@
               <a:buNone/>
             </a:pPr>
             <a:r>
-              <a:rPr lang="en-US" sz="950" dirty="0">
+              <a:rPr sz="880">
                 <a:solidFill>
                   <a:srgbClr val="CBD5E1"/>
                 </a:solidFill>
               </a:rPr>
-              <a:t>SEO-optimized tool pages for high-intent pilot queries</a:t>
+              <a:t>High-intent aviation searches feed discovery</a:t>
             </a:r>
             <a:endParaRPr lang="en-US" sz="950" dirty="0"/>
           </a:p>
@@ -13973,12 +13967,12 @@
               <a:buNone/>
             </a:pPr>
             <a:r>
-              <a:rPr lang="en-US" sz="950" dirty="0">
+              <a:rPr sz="880">
                 <a:solidFill>
                   <a:srgbClr val="CBD5E1"/>
                 </a:solidFill>
               </a:rPr>
-              <a:t>Post-tool-use sign-up nudge (already converting 5x)</a:t>
+              <a:t>Post-tool-use sign-up nudge supports conversion</a:t>
             </a:r>
             <a:endParaRPr lang="en-US" sz="950" dirty="0"/>
           </a:p>
@@ -14162,12 +14156,12 @@
               <a:buNone/>
             </a:pPr>
             <a:r>
-              <a:rPr lang="en-US" sz="950" dirty="0">
+              <a:rPr sz="950">
                 <a:solidFill>
                   <a:srgbClr val="CBD5E1"/>
                 </a:solidFill>
               </a:rPr>
-              <a:t>CFI dashboard drives instructor adoption</a:t>
+              <a:t>CFIs and pilots validate real workflow needs</a:t>
             </a:r>
             <a:endParaRPr lang="en-US" sz="950" dirty="0"/>
           </a:p>
@@ -14222,12 +14216,12 @@
               <a:buNone/>
             </a:pPr>
             <a:r>
-              <a:rPr lang="en-US" sz="950" dirty="0">
+              <a:rPr sz="880">
                 <a:solidFill>
                   <a:srgbClr val="CBD5E1"/>
                 </a:solidFill>
               </a:rPr>
-              <a:t>Instructors bring student pilots to the platform</a:t>
+              <a:t>Instructors bring students into tools &amp; logbook</a:t>
             </a:r>
             <a:endParaRPr lang="en-US" sz="950" dirty="0"/>
           </a:p>
@@ -14282,12 +14276,12 @@
               <a:buNone/>
             </a:pPr>
             <a:r>
-              <a:rPr lang="en-US" sz="950" dirty="0">
+              <a:rPr sz="880">
                 <a:solidFill>
                   <a:srgbClr val="CBD5E1"/>
                 </a:solidFill>
               </a:rPr>
-              <a:t>Flight school partnerships for institutional licensing</a:t>
+              <a:t>Schools and operators create expansion channels</a:t>
             </a:r>
             <a:endParaRPr lang="en-US" sz="950" dirty="0"/>
           </a:p>
@@ -14471,12 +14465,12 @@
               <a:buNone/>
             </a:pPr>
             <a:r>
-              <a:rPr lang="en-US" sz="950" dirty="0">
+              <a:rPr sz="950">
                 <a:solidFill>
                   <a:srgbClr val="CBD5E1"/>
                 </a:solidFill>
               </a:rPr>
-              <a:t>Aircraft listings attract renter pilots</a:t>
+              <a:t>Rental listings attract pilot demand</a:t>
             </a:r>
             <a:endParaRPr lang="en-US" sz="950" dirty="0"/>
           </a:p>
@@ -14531,12 +14525,12 @@
               <a:buNone/>
             </a:pPr>
             <a:r>
-              <a:rPr lang="en-US" sz="950" dirty="0">
+              <a:rPr sz="880">
                 <a:solidFill>
                   <a:srgbClr val="CBD5E1"/>
                 </a:solidFill>
               </a:rPr>
-              <a:t>Renters become listers, grow supply organically</a:t>
+              <a:t>Workflow depth drives repeat platform use</a:t>
             </a:r>
             <a:endParaRPr lang="en-US" sz="950" dirty="0"/>
           </a:p>
@@ -14591,12 +14585,12 @@
               <a:buNone/>
             </a:pPr>
             <a:r>
-              <a:rPr lang="en-US" sz="950" dirty="0">
+              <a:rPr sz="880">
                 <a:solidFill>
                   <a:srgbClr val="CBD5E1"/>
                 </a:solidFill>
               </a:rPr>
-              <a:t>TAILWINDS promo code seeding initial supply</a:t>
+              <a:t>Flight Service adds retention to planning flow</a:t>
             </a:r>
             <a:endParaRPr lang="en-US" sz="950" dirty="0"/>
           </a:p>
@@ -14673,12 +14667,12 @@
               <a:buNone/>
             </a:pPr>
             <a:r>
-              <a:rPr lang="en-US" sz="900" i="1" dirty="0">
+              <a:rPr sz="819" i="1">
                 <a:solidFill>
                   <a:srgbClr val="94A3B8"/>
                 </a:solidFill>
               </a:rPr>
-              <a:t>Each phase reinforces the next — tools feed community, community builds the marketplace, marketplace revenue funds better tools.</a:t>
+              <a:t>Each phase reinforces the next - tools bring pilots in, workflow depth builds trust, marketplace activity expands revenue.</a:t>
             </a:r>
             <a:endParaRPr lang="en-US" sz="900" dirty="0"/>
           </a:p>
